--- a/modulo-03/03.00_ABAP_CDS_modelagem_arquitetural.pptx
+++ b/modulo-03/03.00_ABAP_CDS_modelagem_arquitetural.pptx
@@ -1194,7 +1194,7 @@
                   <a:srgbClr val="8FA3C7"/>
                 </a:solidFill>
               </a:rPr>
-              <a:t>ABAP Moderno · Módulo 02 — Modelagem de Dados com Dicionário e CDS  ·  Visão geral do módulo</a:t>
+              <a:t>ABAP Moderno · Módulo 03 — Modelagem de Dados com Dicionário e CDS  ·  Visão geral do módulo</a:t>
             </a:r>
             <a:endParaRPr lang="en-US" sz="900" dirty="0"/>
           </a:p>
@@ -1340,7 +1340,7 @@
                   <a:srgbClr val="556B82"/>
                 </a:solidFill>
               </a:rPr>
-              <a:t>ABAP Moderno · Módulo 02 — Modelagem de Dados com Dicionário e CDS  ·  Visão geral do módulo</a:t>
+              <a:t>ABAP Moderno · Módulo 03 — Modelagem de Dados com Dicionário e CDS  ·  Visão geral do módulo</a:t>
             </a:r>
             <a:endParaRPr lang="en-US" sz="900" dirty="0"/>
           </a:p>
@@ -1771,7 +1771,7 @@
                   <a:srgbClr val="89D1FF"/>
                 </a:solidFill>
               </a:rPr>
-              <a:t>MÓDULO 02 · VISÃO GERAL</a:t>
+              <a:t>MÓDULO 03 · VISÃO GERAL</a:t>
             </a:r>
             <a:endParaRPr lang="en-US" sz="1400" dirty="0"/>
           </a:p>
@@ -1843,7 +1843,7 @@
                   <a:srgbClr val="D1EFFF"/>
                 </a:solidFill>
               </a:rPr>
-              <a:t>Visão geral do módulo 02: como o Dicionário ABAP e o ABAP CDS formam a base de dados de toda aplicação moderna.</a:t>
+              <a:t>Visão geral do módulo 03: como o Dicionário ABAP e o ABAP CDS formam a base de dados de toda aplicação moderna.</a:t>
             </a:r>
             <a:endParaRPr lang="en-US" sz="1700" dirty="0"/>
           </a:p>
@@ -2113,7 +2113,7 @@
                   <a:srgbClr val="8FA3C7"/>
                 </a:solidFill>
               </a:rPr>
-              <a:t>ABAP Moderno · Módulo 02 — Modelagem de Dados com Dicionário e CDS · Design System SAP Horizon</a:t>
+              <a:t>ABAP Moderno · Módulo 03 — Modelagem de Dados com Dicionário e CDS · Design System SAP Horizon</a:t>
             </a:r>
             <a:endParaRPr lang="en-US" sz="1100" dirty="0"/>
           </a:p>
@@ -3476,7 +3476,7 @@
         </p:blipFill>
         <p:spPr>
           <a:xfrm>
-            <a:off x="5455768" y="1847088"/>
+            <a:off x="5455768" y="3858768"/>
             <a:ext cx="347472" cy="347472"/>
           </a:xfrm>
           <a:prstGeom prst="rect">
@@ -3500,8 +3500,8 @@
         </p:blipFill>
         <p:spPr>
           <a:xfrm>
-            <a:off x="2636444" y="1847088"/>
-            <a:ext cx="347472" cy="347472"/>
+            <a:off x="749808" y="5751576"/>
+            <a:ext cx="310896" cy="310896"/>
           </a:xfrm>
           <a:prstGeom prst="rect">
             <a:avLst/>
@@ -3524,7 +3524,7 @@
         </p:blipFill>
         <p:spPr>
           <a:xfrm>
-            <a:off x="8275091" y="1847088"/>
+            <a:off x="2636444" y="1847088"/>
             <a:ext cx="347472" cy="347472"/>
           </a:xfrm>
           <a:prstGeom prst="rect">
@@ -3548,7 +3548,7 @@
         </p:blipFill>
         <p:spPr>
           <a:xfrm>
-            <a:off x="11094415" y="1847088"/>
+            <a:off x="5455768" y="1847088"/>
             <a:ext cx="347472" cy="347472"/>
           </a:xfrm>
           <a:prstGeom prst="rect">
@@ -3572,7 +3572,7 @@
         </p:blipFill>
         <p:spPr>
           <a:xfrm>
-            <a:off x="5455768" y="3858768"/>
+            <a:off x="11094415" y="1847088"/>
             <a:ext cx="347472" cy="347472"/>
           </a:xfrm>
           <a:prstGeom prst="rect">
@@ -3596,7 +3596,7 @@
         </p:blipFill>
         <p:spPr>
           <a:xfrm>
-            <a:off x="2636444" y="3858768"/>
+            <a:off x="8275091" y="1847088"/>
             <a:ext cx="347472" cy="347472"/>
           </a:xfrm>
           <a:prstGeom prst="rect">
@@ -3620,7 +3620,7 @@
         </p:blipFill>
         <p:spPr>
           <a:xfrm>
-            <a:off x="8275091" y="3858768"/>
+            <a:off x="2636444" y="3858768"/>
             <a:ext cx="347472" cy="347472"/>
           </a:xfrm>
           <a:prstGeom prst="rect">
@@ -3644,8 +3644,8 @@
         </p:blipFill>
         <p:spPr>
           <a:xfrm>
-            <a:off x="749808" y="5751576"/>
-            <a:ext cx="310896" cy="310896"/>
+            <a:off x="8275091" y="3858768"/>
+            <a:ext cx="347472" cy="347472"/>
           </a:xfrm>
           <a:prstGeom prst="rect">
             <a:avLst/>
@@ -4284,7 +4284,7 @@
                   <a:srgbClr val="556B82"/>
                 </a:solidFill>
               </a:rPr>
-              <a:t>módulo 04 deste guia</a:t>
+              <a:t>módulo 02 deste guia</a:t>
             </a:r>
             <a:endParaRPr lang="en-US" sz="1400" dirty="0"/>
           </a:p>
@@ -4376,7 +4376,7 @@
                   <a:srgbClr val="1D2D3E"/>
                 </a:solidFill>
               </a:rPr>
-              <a:t>Por que estudar depois do módulo 04</a:t>
+              <a:t>Por que estudar depois do módulo 02</a:t>
             </a:r>
             <a:endParaRPr lang="en-US" sz="1500" dirty="0"/>
           </a:p>
@@ -4412,7 +4412,7 @@
                   <a:srgbClr val="556B82"/>
                 </a:solidFill>
               </a:rPr>
-              <a:t>A SAP exige os cursos básico e intermediário antes deste. Ele usa ABAP SQL avançado, autorizações e tipos que aparecem no módulo 04: por isso a ordem recomendada é </a:t>
+              <a:t>A SAP exige os cursos básico e intermediário antes deste. Ele usa ABAP SQL avançado, autorizações e tipos que aparecem no módulo 02: por isso ele vem logo depois, na jornada </a:t>
             </a:r>
             <a:r>
               <a:rPr lang="en-US" sz="1200" b="1" dirty="0">
@@ -4420,7 +4420,7 @@
                   <a:srgbClr val="556B82"/>
                 </a:solidFill>
               </a:rPr>
-              <a:t>01 → 04 → 02 → 05</a:t>
+              <a:t>01 → 02 → 03 → 04</a:t>
             </a:r>
             <a:r>
               <a:rPr lang="en-US" sz="1200" dirty="0">
@@ -4986,7 +4986,7 @@
                   <a:srgbClr val="89D1FF"/>
                 </a:solidFill>
               </a:rPr>
-              <a:t>MÓDULO 02 · VISÃO GERAL · SEÇÃO 1</a:t>
+              <a:t>MÓDULO 03 · VISÃO GERAL · SEÇÃO 1</a:t>
             </a:r>
             <a:endParaRPr lang="en-US" sz="1300" dirty="0"/>
           </a:p>
@@ -5195,7 +5195,7 @@
                   <a:srgbClr val="D1EFFF"/>
                 </a:solidFill>
               </a:rPr>
-              <a:t>  02.02 · 02.03</a:t>
+              <a:t>  03.02 · 03.03</a:t>
             </a:r>
             <a:endParaRPr lang="en-US" sz="1400" dirty="0"/>
           </a:p>
@@ -5242,7 +5242,7 @@
                   <a:srgbClr val="D1EFFF"/>
                 </a:solidFill>
               </a:rPr>
-              <a:t>  02.04 – 02.06</a:t>
+              <a:t>  03.04 – 03.06</a:t>
             </a:r>
             <a:endParaRPr lang="en-US" sz="1400" dirty="0"/>
           </a:p>
@@ -5289,7 +5289,7 @@
                   <a:srgbClr val="D1EFFF"/>
                 </a:solidFill>
               </a:rPr>
-              <a:t>  02.07</a:t>
+              <a:t>  03.07</a:t>
             </a:r>
             <a:endParaRPr lang="en-US" sz="1400" dirty="0"/>
           </a:p>
@@ -5501,7 +5501,7 @@
                   <a:srgbClr val="556B82"/>
                 </a:solidFill>
               </a:rPr>
-              <a:t>Tipo técnico e significado (02.03)</a:t>
+              <a:t>Tipo técnico e significado (03.03)</a:t>
             </a:r>
             <a:endParaRPr lang="en-US" sz="1400" dirty="0"/>
           </a:p>
@@ -5608,7 +5608,7 @@
                   <a:srgbClr val="556B82"/>
                 </a:solidFill>
               </a:rPr>
-              <a:t>Chaves, moeda e campos administrativos (02.02)</a:t>
+              <a:t>Chaves, moeda e campos administrativos (03.02)</a:t>
             </a:r>
             <a:endParaRPr lang="en-US" sz="1400" dirty="0"/>
           </a:p>
@@ -5715,7 +5715,7 @@
                   <a:srgbClr val="556B82"/>
                 </a:solidFill>
               </a:rPr>
-              <a:t>Nomes, cálculos e associações (02.04 – 02.06)</a:t>
+              <a:t>Nomes, cálculos e associações (03.04 – 03.06)</a:t>
             </a:r>
             <a:endParaRPr lang="en-US" sz="1400" dirty="0"/>
           </a:p>
@@ -5822,7 +5822,7 @@
                   <a:srgbClr val="556B82"/>
                 </a:solidFill>
               </a:rPr>
-              <a:t>DCL, extensões e anotações (02.07)</a:t>
+              <a:t>DCL, extensões e anotações (03.07)</a:t>
             </a:r>
             <a:endParaRPr lang="en-US" sz="1400" dirty="0"/>
           </a:p>
@@ -6171,8 +6171,8 @@
         </p:blipFill>
         <p:spPr>
           <a:xfrm>
-            <a:off x="1598257" y="2084832"/>
-            <a:ext cx="365760" cy="365760"/>
+            <a:off x="820034" y="3928994"/>
+            <a:ext cx="225308" cy="225308"/>
           </a:xfrm>
           <a:prstGeom prst="rect">
             <a:avLst/>
@@ -6195,7 +6195,7 @@
         </p:blipFill>
         <p:spPr>
           <a:xfrm>
-            <a:off x="4474731" y="2084832"/>
+            <a:off x="1598257" y="2084832"/>
             <a:ext cx="365760" cy="365760"/>
           </a:xfrm>
           <a:prstGeom prst="rect">
@@ -6243,7 +6243,7 @@
         </p:blipFill>
         <p:spPr>
           <a:xfrm>
-            <a:off x="10227678" y="2084832"/>
+            <a:off x="4474731" y="2084832"/>
             <a:ext cx="365760" cy="365760"/>
           </a:xfrm>
           <a:prstGeom prst="rect">
@@ -6267,8 +6267,8 @@
         </p:blipFill>
         <p:spPr>
           <a:xfrm>
-            <a:off x="820034" y="3928994"/>
-            <a:ext cx="225308" cy="225308"/>
+            <a:off x="10227678" y="2084832"/>
+            <a:ext cx="365760" cy="365760"/>
           </a:xfrm>
           <a:prstGeom prst="rect">
             <a:avLst/>
@@ -6527,7 +6527,7 @@
         <p:spPr>
           <a:xfrm>
             <a:off x="640080" y="1700784"/>
-            <a:ext cx="3086100" cy="292608"/>
+            <a:ext cx="3008376" cy="292608"/>
           </a:xfrm>
           <a:prstGeom prst="rect">
             <a:avLst/>
@@ -6547,7 +6547,7 @@
         <p:spPr>
           <a:xfrm>
             <a:off x="640080" y="1700784"/>
-            <a:ext cx="3086100" cy="27432"/>
+            <a:ext cx="3008376" cy="27432"/>
           </a:xfrm>
           <a:prstGeom prst="rect">
             <a:avLst/>
@@ -6567,7 +6567,7 @@
         <p:spPr>
           <a:xfrm>
             <a:off x="731520" y="1719072"/>
-            <a:ext cx="2903220" cy="274320"/>
+            <a:ext cx="2825496" cy="274320"/>
           </a:xfrm>
           <a:prstGeom prst="rect">
             <a:avLst/>
@@ -6588,7 +6588,7 @@
                   <a:srgbClr val="FFFFFF"/>
                 </a:solidFill>
               </a:rPr>
-              <a:t>zs4d430_c_employeequery.ddls.asddls</a:t>
+              <a:t>zc_pc_cliente_consulta.ddls.asddls</a:t>
             </a:r>
             <a:endParaRPr lang="en-US" sz="950" dirty="0"/>
           </a:p>
@@ -6624,7 +6624,7 @@
                   <a:srgbClr val="9DA5B4"/>
                 </a:solidFill>
               </a:rPr>
-              <a:t>ZS4D430_## › Core Data Services</a:t>
+              <a:t>Exemplo sobre ZR_PC_CLIENTE (projeto Pedidos de Compras)</a:t>
             </a:r>
             <a:endParaRPr lang="en-US" sz="850" dirty="0"/>
           </a:p>
@@ -6910,6 +6910,26 @@
             </a:r>
             <a:endParaRPr lang="en-US" sz="1050" dirty="0"/>
           </a:p>
+          <a:p>
+            <a:pPr algn="r" indent="0" marL="0">
+              <a:lnSpc>
+                <a:spcPct val="105000"/>
+              </a:lnSpc>
+              <a:buNone/>
+            </a:pPr>
+            <a:r>
+              <a:rPr lang="en-US" sz="1050" dirty="0">
+                <a:solidFill>
+                  <a:srgbClr val="6E7681"/>
+                </a:solidFill>
+                <a:latin typeface="Courier New" pitchFamily="34" charset="0"/>
+                <a:ea typeface="Courier New" pitchFamily="34" charset="-122"/>
+                <a:cs typeface="Courier New" pitchFamily="34" charset="-120"/>
+              </a:rPr>
+              <a:t>14</a:t>
+            </a:r>
+            <a:endParaRPr lang="en-US" sz="1050" dirty="0"/>
+          </a:p>
         </p:txBody>
       </p:sp>
       <p:sp>
@@ -7120,7 +7140,7 @@
                 <a:ea typeface="Courier New" pitchFamily="34" charset="-122"/>
                 <a:cs typeface="Courier New" pitchFamily="34" charset="-120"/>
               </a:rPr>
-              <a:t>ZS4D430_C_EmployeeQuery</a:t>
+              <a:t>ZC_PC_CLIENTE_CONSULTA</a:t>
             </a:r>
             <a:endParaRPr lang="en-US" sz="1050" dirty="0"/>
           </a:p>
@@ -7195,7 +7215,7 @@
                 <a:ea typeface="Courier New" pitchFamily="34" charset="-122"/>
                 <a:cs typeface="Courier New" pitchFamily="34" charset="-120"/>
               </a:rPr>
-              <a:t>p_date</a:t>
+              <a:t>p_data</a:t>
             </a:r>
             <a:r>
               <a:rPr lang="en-US" sz="1050" dirty="0">
@@ -7358,7 +7378,7 @@
                 <a:ea typeface="Courier New" pitchFamily="34" charset="-122"/>
                 <a:cs typeface="Courier New" pitchFamily="34" charset="-120"/>
               </a:rPr>
-              <a:t>ZS4D430_R_Employee</a:t>
+              <a:t>ZR_PC_CLIENTE</a:t>
             </a:r>
             <a:endParaRPr lang="en-US" sz="1050" dirty="0"/>
           </a:p>
@@ -7431,7 +7451,7 @@
                 <a:ea typeface="Courier New" pitchFamily="34" charset="-122"/>
                 <a:cs typeface="Courier New" pitchFamily="34" charset="-120"/>
               </a:rPr>
-              <a:t>EmployeeId</a:t>
+              <a:t>ClienteUUID</a:t>
             </a:r>
             <a:r>
               <a:rPr lang="en-US" sz="1050" dirty="0">
@@ -7506,7 +7526,7 @@
                 <a:ea typeface="Courier New" pitchFamily="34" charset="-122"/>
                 <a:cs typeface="Courier New" pitchFamily="34" charset="-120"/>
               </a:rPr>
-              <a:t>FirstName</a:t>
+              <a:t>Nome</a:t>
             </a:r>
             <a:r>
               <a:rPr lang="en-US" sz="1050" dirty="0">
@@ -7539,7 +7559,7 @@
                 <a:ea typeface="Courier New" pitchFamily="34" charset="-122"/>
                 <a:cs typeface="Courier New" pitchFamily="34" charset="-120"/>
               </a:rPr>
-              <a:t>LastName</a:t>
+              <a:t>Cpf</a:t>
             </a:r>
             <a:r>
               <a:rPr lang="en-US" sz="1050" dirty="0">
@@ -7605,40 +7625,40 @@
                 <a:ea typeface="Courier New" pitchFamily="34" charset="-122"/>
                 <a:cs typeface="Courier New" pitchFamily="34" charset="-120"/>
               </a:rPr>
+              <a:t>      </a:t>
+            </a:r>
+            <a:r>
+              <a:rPr lang="en-US" sz="1050" dirty="0">
+                <a:solidFill>
+                  <a:srgbClr val="569CD6"/>
+                </a:solidFill>
+                <a:latin typeface="Courier New" pitchFamily="34" charset="0"/>
+                <a:ea typeface="Courier New" pitchFamily="34" charset="-122"/>
+                <a:cs typeface="Courier New" pitchFamily="34" charset="-120"/>
+              </a:rPr>
+              <a:t>as</a:t>
+            </a:r>
+            <a:r>
+              <a:rPr lang="en-US" sz="1050" dirty="0">
+                <a:solidFill>
+                  <a:srgbClr val="CCCCCC"/>
+                </a:solidFill>
+                <a:latin typeface="Courier New" pitchFamily="34" charset="0"/>
+                <a:ea typeface="Courier New" pitchFamily="34" charset="-122"/>
+                <a:cs typeface="Courier New" pitchFamily="34" charset="-120"/>
+              </a:rPr>
               <a:t> </a:t>
             </a:r>
             <a:r>
               <a:rPr lang="en-US" sz="1050" dirty="0">
                 <a:solidFill>
-                  <a:srgbClr val="569CD6"/>
-                </a:solidFill>
-                <a:latin typeface="Courier New" pitchFamily="34" charset="0"/>
-                <a:ea typeface="Courier New" pitchFamily="34" charset="-122"/>
-                <a:cs typeface="Courier New" pitchFamily="34" charset="-120"/>
-              </a:rPr>
-              <a:t>as</a:t>
-            </a:r>
-            <a:r>
-              <a:rPr lang="en-US" sz="1050" dirty="0">
-                <a:solidFill>
                   <a:srgbClr val="CCCCCC"/>
                 </a:solidFill>
                 <a:latin typeface="Courier New" pitchFamily="34" charset="0"/>
                 <a:ea typeface="Courier New" pitchFamily="34" charset="-122"/>
                 <a:cs typeface="Courier New" pitchFamily="34" charset="-120"/>
               </a:rPr>
-              <a:t> </a:t>
-            </a:r>
-            <a:r>
-              <a:rPr lang="en-US" sz="1050" dirty="0">
-                <a:solidFill>
-                  <a:srgbClr val="CCCCCC"/>
-                </a:solidFill>
-                <a:latin typeface="Courier New" pitchFamily="34" charset="0"/>
-                <a:ea typeface="Courier New" pitchFamily="34" charset="-122"/>
-                <a:cs typeface="Courier New" pitchFamily="34" charset="-120"/>
-              </a:rPr>
-              <a:t>FullName</a:t>
+              <a:t>NomeCpf</a:t>
             </a:r>
             <a:r>
               <a:rPr lang="en-US" sz="1050" dirty="0">
@@ -7680,7 +7700,7 @@
                 <a:ea typeface="Courier New" pitchFamily="34" charset="-122"/>
                 <a:cs typeface="Courier New" pitchFamily="34" charset="-120"/>
               </a:rPr>
-              <a:t>_Department</a:t>
+              <a:t>_EnderecoPrincipal</a:t>
             </a:r>
             <a:r>
               <a:rPr lang="en-US" sz="1050" dirty="0">
@@ -7702,7 +7722,7 @@
                 <a:ea typeface="Courier New" pitchFamily="34" charset="-122"/>
                 <a:cs typeface="Courier New" pitchFamily="34" charset="-120"/>
               </a:rPr>
-              <a:t>Description</a:t>
+              <a:t>Cidade</a:t>
             </a:r>
             <a:r>
               <a:rPr lang="en-US" sz="1050" dirty="0">
@@ -7713,7 +7733,7 @@
                 <a:ea typeface="Courier New" pitchFamily="34" charset="-122"/>
                 <a:cs typeface="Courier New" pitchFamily="34" charset="-120"/>
               </a:rPr>
-              <a:t>                    </a:t>
+              <a:t>              </a:t>
             </a:r>
             <a:r>
               <a:rPr lang="en-US" sz="1050" dirty="0">
@@ -7746,7 +7766,7 @@
                 <a:ea typeface="Courier New" pitchFamily="34" charset="-122"/>
                 <a:cs typeface="Courier New" pitchFamily="34" charset="-120"/>
               </a:rPr>
-              <a:t>DepartmentName</a:t>
+              <a:t>Cidade</a:t>
             </a:r>
             <a:r>
               <a:rPr lang="en-US" sz="1050" dirty="0">
@@ -7788,6 +7808,39 @@
                 <a:ea typeface="Courier New" pitchFamily="34" charset="-122"/>
                 <a:cs typeface="Courier New" pitchFamily="34" charset="-120"/>
               </a:rPr>
+              <a:t>div</a:t>
+            </a:r>
+            <a:r>
+              <a:rPr lang="en-US" sz="1050" dirty="0">
+                <a:solidFill>
+                  <a:srgbClr val="CCCCCC"/>
+                </a:solidFill>
+                <a:latin typeface="Courier New" pitchFamily="34" charset="0"/>
+                <a:ea typeface="Courier New" pitchFamily="34" charset="-122"/>
+                <a:cs typeface="Courier New" pitchFamily="34" charset="-120"/>
+              </a:rPr>
+              <a:t>(</a:t>
+            </a:r>
+            <a:r>
+              <a:rPr lang="en-US" sz="1050" dirty="0">
+                <a:solidFill>
+                  <a:srgbClr val="CCCCCC"/>
+                </a:solidFill>
+                <a:latin typeface="Courier New" pitchFamily="34" charset="0"/>
+                <a:ea typeface="Courier New" pitchFamily="34" charset="-122"/>
+                <a:cs typeface="Courier New" pitchFamily="34" charset="-120"/>
+              </a:rPr>
+              <a:t> </a:t>
+            </a:r>
+            <a:r>
+              <a:rPr lang="en-US" sz="1050" dirty="0">
+                <a:solidFill>
+                  <a:srgbClr val="DCDCAA"/>
+                </a:solidFill>
+                <a:latin typeface="Courier New" pitchFamily="34" charset="0"/>
+                <a:ea typeface="Courier New" pitchFamily="34" charset="-122"/>
+                <a:cs typeface="Courier New" pitchFamily="34" charset="-120"/>
+              </a:rPr>
               <a:t>dats_days_between</a:t>
             </a:r>
             <a:r>
@@ -7821,7 +7874,7 @@
                 <a:ea typeface="Courier New" pitchFamily="34" charset="-122"/>
                 <a:cs typeface="Courier New" pitchFamily="34" charset="-120"/>
               </a:rPr>
-              <a:t>EntryDate</a:t>
+              <a:t>DataNascimento</a:t>
             </a:r>
             <a:r>
               <a:rPr lang="en-US" sz="1050" dirty="0">
@@ -7833,50 +7886,6 @@
                 <a:cs typeface="Courier New" pitchFamily="34" charset="-120"/>
               </a:rPr>
               <a:t>,</a:t>
-            </a:r>
-            <a:r>
-              <a:rPr lang="en-US" sz="1050" dirty="0">
-                <a:solidFill>
-                  <a:srgbClr val="CCCCCC"/>
-                </a:solidFill>
-                <a:latin typeface="Courier New" pitchFamily="34" charset="0"/>
-                <a:ea typeface="Courier New" pitchFamily="34" charset="-122"/>
-                <a:cs typeface="Courier New" pitchFamily="34" charset="-120"/>
-              </a:rPr>
-              <a:t> </a:t>
-            </a:r>
-            <a:r>
-              <a:rPr lang="en-US" sz="1050" dirty="0">
-                <a:solidFill>
-                  <a:srgbClr val="C586C0"/>
-                </a:solidFill>
-                <a:latin typeface="Courier New" pitchFamily="34" charset="0"/>
-                <a:ea typeface="Courier New" pitchFamily="34" charset="-122"/>
-                <a:cs typeface="Courier New" pitchFamily="34" charset="-120"/>
-              </a:rPr>
-              <a:t>$parameters.p_date</a:t>
-            </a:r>
-            <a:r>
-              <a:rPr lang="en-US" sz="1050" dirty="0">
-                <a:solidFill>
-                  <a:srgbClr val="CCCCCC"/>
-                </a:solidFill>
-                <a:latin typeface="Courier New" pitchFamily="34" charset="0"/>
-                <a:ea typeface="Courier New" pitchFamily="34" charset="-122"/>
-                <a:cs typeface="Courier New" pitchFamily="34" charset="-120"/>
-              </a:rPr>
-              <a:t> </a:t>
-            </a:r>
-            <a:r>
-              <a:rPr lang="en-US" sz="1050" dirty="0">
-                <a:solidFill>
-                  <a:srgbClr val="CCCCCC"/>
-                </a:solidFill>
-                <a:latin typeface="Courier New" pitchFamily="34" charset="0"/>
-                <a:ea typeface="Courier New" pitchFamily="34" charset="-122"/>
-                <a:cs typeface="Courier New" pitchFamily="34" charset="-120"/>
-              </a:rPr>
-              <a:t>)</a:t>
             </a:r>
             <a:endParaRPr lang="en-US" sz="1050" dirty="0"/>
           </a:p>
@@ -7896,18 +7905,18 @@
                 <a:ea typeface="Courier New" pitchFamily="34" charset="-122"/>
                 <a:cs typeface="Courier New" pitchFamily="34" charset="-120"/>
               </a:rPr>
-              <a:t>                                                  </a:t>
-            </a:r>
-            <a:r>
-              <a:rPr lang="en-US" sz="1050" dirty="0">
-                <a:solidFill>
-                  <a:srgbClr val="569CD6"/>
-                </a:solidFill>
-                <a:latin typeface="Courier New" pitchFamily="34" charset="0"/>
-                <a:ea typeface="Courier New" pitchFamily="34" charset="-122"/>
-                <a:cs typeface="Courier New" pitchFamily="34" charset="-120"/>
-              </a:rPr>
-              <a:t>as</a:t>
+              <a:t>                              </a:t>
+            </a:r>
+            <a:r>
+              <a:rPr lang="en-US" sz="1050" dirty="0">
+                <a:solidFill>
+                  <a:srgbClr val="C586C0"/>
+                </a:solidFill>
+                <a:latin typeface="Courier New" pitchFamily="34" charset="0"/>
+                <a:ea typeface="Courier New" pitchFamily="34" charset="-122"/>
+                <a:cs typeface="Courier New" pitchFamily="34" charset="-120"/>
+              </a:rPr>
+              <a:t>$parameters.p_data</a:t>
             </a:r>
             <a:r>
               <a:rPr lang="en-US" sz="1050" dirty="0">
@@ -7929,7 +7938,7 @@
                 <a:ea typeface="Courier New" pitchFamily="34" charset="-122"/>
                 <a:cs typeface="Courier New" pitchFamily="34" charset="-120"/>
               </a:rPr>
-              <a:t>DaysInCompany</a:t>
+              <a:t>)</a:t>
             </a:r>
             <a:r>
               <a:rPr lang="en-US" sz="1050" dirty="0">
@@ -7941,6 +7950,50 @@
                 <a:cs typeface="Courier New" pitchFamily="34" charset="-120"/>
               </a:rPr>
               <a:t>,</a:t>
+            </a:r>
+            <a:r>
+              <a:rPr lang="en-US" sz="1050" dirty="0">
+                <a:solidFill>
+                  <a:srgbClr val="CCCCCC"/>
+                </a:solidFill>
+                <a:latin typeface="Courier New" pitchFamily="34" charset="0"/>
+                <a:ea typeface="Courier New" pitchFamily="34" charset="-122"/>
+                <a:cs typeface="Courier New" pitchFamily="34" charset="-120"/>
+              </a:rPr>
+              <a:t> </a:t>
+            </a:r>
+            <a:r>
+              <a:rPr lang="en-US" sz="1050" dirty="0">
+                <a:solidFill>
+                  <a:srgbClr val="B5CEA8"/>
+                </a:solidFill>
+                <a:latin typeface="Courier New" pitchFamily="34" charset="0"/>
+                <a:ea typeface="Courier New" pitchFamily="34" charset="-122"/>
+                <a:cs typeface="Courier New" pitchFamily="34" charset="-120"/>
+              </a:rPr>
+              <a:t>365</a:t>
+            </a:r>
+            <a:r>
+              <a:rPr lang="en-US" sz="1050" dirty="0">
+                <a:solidFill>
+                  <a:srgbClr val="CCCCCC"/>
+                </a:solidFill>
+                <a:latin typeface="Courier New" pitchFamily="34" charset="0"/>
+                <a:ea typeface="Courier New" pitchFamily="34" charset="-122"/>
+                <a:cs typeface="Courier New" pitchFamily="34" charset="-120"/>
+              </a:rPr>
+              <a:t> </a:t>
+            </a:r>
+            <a:r>
+              <a:rPr lang="en-US" sz="1050" dirty="0">
+                <a:solidFill>
+                  <a:srgbClr val="CCCCCC"/>
+                </a:solidFill>
+                <a:latin typeface="Courier New" pitchFamily="34" charset="0"/>
+                <a:ea typeface="Courier New" pitchFamily="34" charset="-122"/>
+                <a:cs typeface="Courier New" pitchFamily="34" charset="-120"/>
+              </a:rPr>
+              <a:t>)</a:t>
             </a:r>
             <a:endParaRPr lang="en-US" sz="1050" dirty="0"/>
           </a:p>
@@ -7960,6 +8013,70 @@
                 <a:ea typeface="Courier New" pitchFamily="34" charset="-122"/>
                 <a:cs typeface="Courier New" pitchFamily="34" charset="-120"/>
               </a:rPr>
+              <a:t>                                             </a:t>
+            </a:r>
+            <a:r>
+              <a:rPr lang="en-US" sz="1050" dirty="0">
+                <a:solidFill>
+                  <a:srgbClr val="569CD6"/>
+                </a:solidFill>
+                <a:latin typeface="Courier New" pitchFamily="34" charset="0"/>
+                <a:ea typeface="Courier New" pitchFamily="34" charset="-122"/>
+                <a:cs typeface="Courier New" pitchFamily="34" charset="-120"/>
+              </a:rPr>
+              <a:t>as</a:t>
+            </a:r>
+            <a:r>
+              <a:rPr lang="en-US" sz="1050" dirty="0">
+                <a:solidFill>
+                  <a:srgbClr val="CCCCCC"/>
+                </a:solidFill>
+                <a:latin typeface="Courier New" pitchFamily="34" charset="0"/>
+                <a:ea typeface="Courier New" pitchFamily="34" charset="-122"/>
+                <a:cs typeface="Courier New" pitchFamily="34" charset="-120"/>
+              </a:rPr>
+              <a:t> </a:t>
+            </a:r>
+            <a:r>
+              <a:rPr lang="en-US" sz="1050" dirty="0">
+                <a:solidFill>
+                  <a:srgbClr val="CCCCCC"/>
+                </a:solidFill>
+                <a:latin typeface="Courier New" pitchFamily="34" charset="0"/>
+                <a:ea typeface="Courier New" pitchFamily="34" charset="-122"/>
+                <a:cs typeface="Courier New" pitchFamily="34" charset="-120"/>
+              </a:rPr>
+              <a:t>Idade</a:t>
+            </a:r>
+            <a:r>
+              <a:rPr lang="en-US" sz="1050" dirty="0">
+                <a:solidFill>
+                  <a:srgbClr val="CCCCCC"/>
+                </a:solidFill>
+                <a:latin typeface="Courier New" pitchFamily="34" charset="0"/>
+                <a:ea typeface="Courier New" pitchFamily="34" charset="-122"/>
+                <a:cs typeface="Courier New" pitchFamily="34" charset="-120"/>
+              </a:rPr>
+              <a:t>,</a:t>
+            </a:r>
+            <a:endParaRPr lang="en-US" sz="1050" dirty="0"/>
+          </a:p>
+          <a:p>
+            <a:pPr indent="0" marL="0">
+              <a:lnSpc>
+                <a:spcPct val="105000"/>
+              </a:lnSpc>
+              <a:buNone/>
+            </a:pPr>
+            <a:r>
+              <a:rPr lang="en-US" sz="1050" dirty="0">
+                <a:solidFill>
+                  <a:srgbClr val="CCCCCC"/>
+                </a:solidFill>
+                <a:latin typeface="Courier New" pitchFamily="34" charset="0"/>
+                <a:ea typeface="Courier New" pitchFamily="34" charset="-122"/>
+                <a:cs typeface="Courier New" pitchFamily="34" charset="-120"/>
+              </a:rPr>
               <a:t>      </a:t>
             </a:r>
             <a:r>
@@ -7971,7 +8088,7 @@
                 <a:ea typeface="Courier New" pitchFamily="34" charset="-122"/>
                 <a:cs typeface="Courier New" pitchFamily="34" charset="-120"/>
               </a:rPr>
-              <a:t>_Department</a:t>
+              <a:t>_EnderecoPrincipal</a:t>
             </a:r>
             <a:endParaRPr lang="en-US" sz="1050" dirty="0"/>
           </a:p>
@@ -8120,7 +8237,7 @@
                   <a:srgbClr val="1D2D3E"/>
                 </a:solidFill>
               </a:rPr>
-              <a:t>Proteção · 02.07</a:t>
+              <a:t>Proteção · 03.07</a:t>
             </a:r>
             <a:endParaRPr lang="en-US" sz="1400" dirty="0"/>
           </a:p>
@@ -8240,7 +8357,7 @@
                   <a:srgbClr val="1D2D3E"/>
                 </a:solidFill>
               </a:rPr>
-              <a:t>Parâmetro · 02.06</a:t>
+              <a:t>Parâmetro · 03.06</a:t>
             </a:r>
             <a:endParaRPr lang="en-US" sz="1400" dirty="0"/>
           </a:p>
@@ -8257,7 +8374,7 @@
                 <a:ea typeface="Courier New" pitchFamily="34" charset="-122"/>
                 <a:cs typeface="Courier New" pitchFamily="34" charset="-120"/>
               </a:rPr>
-              <a:t>p_date</a:t>
+              <a:t>p_data</a:t>
             </a:r>
             <a:r>
               <a:rPr lang="en-US" sz="1050" dirty="0">
@@ -8360,7 +8477,7 @@
                   <a:srgbClr val="1D2D3E"/>
                 </a:solidFill>
               </a:rPr>
-              <a:t>Path expression · 02.05</a:t>
+              <a:t>Path expression · 03.05</a:t>
             </a:r>
             <a:endParaRPr lang="en-US" sz="1400" dirty="0"/>
           </a:p>
@@ -8377,7 +8494,7 @@
                 <a:ea typeface="Courier New" pitchFamily="34" charset="-122"/>
                 <a:cs typeface="Courier New" pitchFamily="34" charset="-120"/>
               </a:rPr>
-              <a:t>_Department.Description</a:t>
+              <a:t>_EnderecoPrincipal.Cidade</a:t>
             </a:r>
             <a:r>
               <a:rPr lang="en-US" sz="1050" dirty="0">
@@ -8480,7 +8597,7 @@
                   <a:srgbClr val="1D2D3E"/>
                 </a:solidFill>
               </a:rPr>
-              <a:t>Funções · 02.06</a:t>
+              <a:t>Funções · 03.06</a:t>
             </a:r>
             <a:endParaRPr lang="en-US" sz="1400" dirty="0"/>
           </a:p>
@@ -9178,7 +9295,7 @@
                   <a:srgbClr val="89D1FF"/>
                 </a:solidFill>
               </a:rPr>
-              <a:t>Próxima aula · 02.01  </a:t>
+              <a:t>Próxima aula · 03.01  </a:t>
             </a:r>
             <a:r>
               <a:rPr lang="en-US" sz="1500" dirty="0">
